--- a/atelier/atelier-f01-project-reveal.pptx
+++ b/atelier/atelier-f01-project-reveal.pptx
@@ -3360,7 +3360,7 @@
         </p:nvSpPr>
         <p:spPr>
           <a:xfrm>
-            <a:off x="650968" y="5880193"/>
+            <a:off x="650968" y="5823043"/>
             <a:ext cx="107763" cy="107763"/>
           </a:xfrm>
           <a:prstGeom prst="rect">
@@ -3404,7 +3404,7 @@
         </p:nvSpPr>
         <p:spPr>
           <a:xfrm>
-            <a:off x="650968" y="6375493"/>
+            <a:off x="650968" y="6318343"/>
             <a:ext cx="107763" cy="107763"/>
           </a:xfrm>
           <a:prstGeom prst="rect">
@@ -3448,7 +3448,7 @@
         </p:nvSpPr>
         <p:spPr>
           <a:xfrm>
-            <a:off x="650968" y="6870793"/>
+            <a:off x="650968" y="6813643"/>
             <a:ext cx="107763" cy="107763"/>
           </a:xfrm>
           <a:prstGeom prst="rect">
@@ -3728,7 +3728,7 @@
         </p:nvSpPr>
         <p:spPr>
           <a:xfrm>
-            <a:off x="666750" y="3171825"/>
+            <a:off x="666750" y="3228975"/>
             <a:ext cx="8197691" cy="133350"/>
           </a:xfrm>
           <a:prstGeom prst="rect">
@@ -3763,8 +3763,8 @@
         </p:nvSpPr>
         <p:spPr>
           <a:xfrm>
-            <a:off x="666750" y="3476625"/>
-            <a:ext cx="4885432" cy="1143000"/>
+            <a:off x="666750" y="3533775"/>
+            <a:ext cx="4885432" cy="1028700"/>
           </a:xfrm>
           <a:prstGeom prst="rect">
             <a:avLst/>
@@ -3777,7 +3777,7 @@
           <a:p>
             <a:pPr algn="l">
               <a:lnSpc>
-                <a:spcPct val="100000"/>
+                <a:spcPct val="90000"/>
               </a:lnSpc>
             </a:pPr>
             <a:r>
@@ -3802,7 +3802,7 @@
         </p:nvSpPr>
         <p:spPr>
           <a:xfrm>
-            <a:off x="666750" y="4772025"/>
+            <a:off x="666750" y="4714875"/>
             <a:ext cx="8197691" cy="123825"/>
           </a:xfrm>
           <a:prstGeom prst="rect">
@@ -3837,7 +3837,7 @@
         </p:nvSpPr>
         <p:spPr>
           <a:xfrm>
-            <a:off x="666750" y="5048250"/>
+            <a:off x="666750" y="4991100"/>
             <a:ext cx="8197691" cy="428625"/>
           </a:xfrm>
           <a:prstGeom prst="rect">
@@ -3872,7 +3872,7 @@
         </p:nvSpPr>
         <p:spPr>
           <a:xfrm>
-            <a:off x="876300" y="5838825"/>
+            <a:off x="876300" y="5781675"/>
             <a:ext cx="2390775" cy="152400"/>
           </a:xfrm>
           <a:prstGeom prst="rect">
@@ -3907,7 +3907,7 @@
         </p:nvSpPr>
         <p:spPr>
           <a:xfrm>
-            <a:off x="876300" y="6029325"/>
+            <a:off x="876300" y="5972175"/>
             <a:ext cx="2390775" cy="114300"/>
           </a:xfrm>
           <a:prstGeom prst="rect">
@@ -3942,7 +3942,7 @@
         </p:nvSpPr>
         <p:spPr>
           <a:xfrm>
-            <a:off x="876300" y="6334125"/>
+            <a:off x="876300" y="6276975"/>
             <a:ext cx="2703433" cy="152400"/>
           </a:xfrm>
           <a:prstGeom prst="rect">
@@ -3977,7 +3977,7 @@
         </p:nvSpPr>
         <p:spPr>
           <a:xfrm>
-            <a:off x="876300" y="6524625"/>
+            <a:off x="876300" y="6467475"/>
             <a:ext cx="2703433" cy="114300"/>
           </a:xfrm>
           <a:prstGeom prst="rect">
@@ -4012,7 +4012,7 @@
         </p:nvSpPr>
         <p:spPr>
           <a:xfrm>
-            <a:off x="876300" y="6829425"/>
+            <a:off x="876300" y="6772275"/>
             <a:ext cx="2431256" cy="152400"/>
           </a:xfrm>
           <a:prstGeom prst="rect">
@@ -4047,7 +4047,7 @@
         </p:nvSpPr>
         <p:spPr>
           <a:xfrm>
-            <a:off x="876300" y="7019925"/>
+            <a:off x="876300" y="6962775"/>
             <a:ext cx="2431256" cy="114300"/>
           </a:xfrm>
           <a:prstGeom prst="rect">
